--- a/TaskManager.pptx
+++ b/TaskManager.pptx
@@ -115,10 +115,43 @@
       </a:defRPr>
     </a:lvl9pPr>
   </p:defaultTextStyle>
+  <p:extLst>
+    <p:ext uri="{EFAFB233-063F-42B5-8137-9DF3F51BA10A}">
+      <p15:sldGuideLst xmlns:p15="http://schemas.microsoft.com/office/powerpoint/2012/main"/>
+    </p:ext>
+  </p:extLst>
 </p:presentation>
 </file>
 
 <file path=ppt/ink/ink1.xml><?xml version="1.0" encoding="utf-8"?>
+<inkml:ink xmlns:inkml="http://www.w3.org/2003/InkML">
+  <inkml:definitions>
+    <inkml:context xml:id="ctx0">
+      <inkml:inkSource xml:id="inkSrc0">
+        <inkml:traceFormat>
+          <inkml:channel name="X" type="integer" min="-2.14748E9" max="2.14748E9" units="cm"/>
+          <inkml:channel name="Y" type="integer" min="-2.14748E9" max="2.14748E9" units="cm"/>
+          <inkml:channel name="F" type="integer" max="32767" units="dev"/>
+        </inkml:traceFormat>
+        <inkml:channelProperties>
+          <inkml:channelProperty channel="X" name="resolution" value="1000" units="1/cm"/>
+          <inkml:channelProperty channel="Y" name="resolution" value="1000" units="1/cm"/>
+          <inkml:channelProperty channel="F" name="resolution" value="0" units="1/dev"/>
+        </inkml:channelProperties>
+      </inkml:inkSource>
+      <inkml:timestamp xml:id="ts0" timeString="2026-07-13T00:04:12.486"/>
+    </inkml:context>
+    <inkml:brush xml:id="br0">
+      <inkml:brushProperty name="width" value="0.035" units="cm"/>
+      <inkml:brushProperty name="height" value="0.035" units="cm"/>
+      <inkml:brushProperty name="color" value="#E71224"/>
+    </inkml:brush>
+  </inkml:definitions>
+  <inkml:trace contextRef="#ctx0" brushRef="#br0">1333 3 24575,'-908'0'0,"892"1"0,1 1 0,-1 0 0,1 1 0,-1 1 0,1 0 0,0 1 0,1 1 0,-1 0 0,1 1 0,0 0 0,1 1 0,-1 1 0,2 0 0,-19 18 0,24-20 0,0 1 0,0 1 0,1-1 0,-8 16 0,10-16 0,-1 0 0,0 0 0,0-1 0,-1 1 0,0-1 0,-12 11 0,7-10 0,6-4 0,0-1 0,0 1 0,1-1 0,0 1 0,0 0 0,0 1 0,0-1 0,1 1 0,-1 0 0,-3 8 0,-1 5 0,2 0 0,0 0 0,1 1 0,0 0 0,2 0 0,-2 23 0,4 119 0,3-89 0,-2-59 0,1 0 0,1 1 0,1-1 0,0-1 0,0 1 0,9 19 0,39 72 0,-28-60 0,-18-32 0,0 1 0,-1 0 0,-1-1 0,0 1 0,0 1 0,0 15 0,-2-14 0,1-1 0,1 0 0,0 0 0,1 0 0,6 16 0,-5-20 0,1 1 0,1-1 0,0 0 0,0 0 0,15 15 0,50 41 0,-6-7 0,-23-16 0,72 54 0,41 10 0,-131-91 0,-7-6 0,1-1 0,-1 0 0,27 8 0,32 14 0,-26-4 0,67 31 0,-103-52 0,1-1 0,1 0 0,-1-1 0,1 0 0,29 1 0,198-5 0,-101-2 0,469 2 0,-590-1 0,1-1 0,-1-1 0,35-8 0,65-27 0,-94 29 0,28-10 0,-17 4 0,43-8 0,-74 21 0,0 0 0,0-1 0,0 0 0,0 0 0,0-1 0,-1 0 0,0 0 0,8-6 0,1-4 0,28-28 0,-28 24 0,35-25 0,-42 38 0,-1-1 0,0-1 0,0 0 0,-1 0 0,0 0 0,0-1 0,-1 0 0,0 0 0,0 0 0,5-11 0,16-49 0,-13 33 0,23-46 0,-30 69 0,49-97 0,-50 94 0,-1 1 0,-1-1 0,0 0 0,0 0 0,-2 0 0,1-16 0,-2 18 0,0-67 0,-2 71 0,0 0 0,0 0 0,0 0 0,-1 0 0,-1 0 0,-5-13 0,5 17 0,0 1 0,0-1 0,0 1 0,-1 0 0,1 0 0,-1 0 0,0 1 0,-1-1 0,1 1 0,-1 0 0,-4-3 0,3 3 0,0-1 0,1 0 0,-1 0 0,1 0 0,0-1 0,-7-9 0,4 3 0,1 0 0,-1 1 0,-1-1 0,0 2 0,0-1 0,-1 2 0,0-1 0,-1 1 0,-12-7 0,-40-24 0,-93-76 0,144 106 0,-39-31 0,0 1 0,-65-63 0,-48-65 0,154 158 0,0 1 0,0 0 0,-1 1 0,-21-11 0,-51-20 0,59 28 0,5 3 0,0 1 0,0 1 0,0 0 0,-1 1 0,-33-1 0,-103 5 0,72 2 0,-187-2-1365,245 0-5461</inkml:trace>
+</inkml:ink>
+</file>
+
+<file path=ppt/ink/ink2.xml><?xml version="1.0" encoding="utf-8"?>
 <inkml:ink xmlns:inkml="http://www.w3.org/2003/InkML">
   <inkml:definitions>
     <inkml:context xml:id="ctx0">
@@ -146,7 +179,7 @@
 </inkml:ink>
 </file>
 
-<file path=ppt/ink/ink2.xml><?xml version="1.0" encoding="utf-8"?>
+<file path=ppt/ink/ink3.xml><?xml version="1.0" encoding="utf-8"?>
 <inkml:ink xmlns:inkml="http://www.w3.org/2003/InkML">
   <inkml:definitions>
     <inkml:context xml:id="ctx0">
@@ -174,7 +207,7 @@
 </inkml:ink>
 </file>
 
-<file path=ppt/ink/ink3.xml><?xml version="1.0" encoding="utf-8"?>
+<file path=ppt/ink/ink4.xml><?xml version="1.0" encoding="utf-8"?>
 <inkml:ink xmlns:inkml="http://www.w3.org/2003/InkML">
   <inkml:definitions>
     <inkml:context xml:id="ctx0">
@@ -349,7 +382,7 @@
           <a:p>
             <a:fld id="{213391A8-7533-4DB4-AAEF-AD0BE3016822}" type="datetimeFigureOut">
               <a:rPr kumimoji="1" lang="ja-JP" altLang="en-US" smtClean="0"/>
-              <a:t>2026/7/9</a:t>
+              <a:t>2026/7/13</a:t>
             </a:fld>
             <a:endParaRPr kumimoji="1" lang="ja-JP" altLang="en-US"/>
           </a:p>
@@ -579,7 +612,7 @@
           <a:p>
             <a:fld id="{213391A8-7533-4DB4-AAEF-AD0BE3016822}" type="datetimeFigureOut">
               <a:rPr kumimoji="1" lang="ja-JP" altLang="en-US" smtClean="0"/>
-              <a:t>2026/7/9</a:t>
+              <a:t>2026/7/13</a:t>
             </a:fld>
             <a:endParaRPr kumimoji="1" lang="ja-JP" altLang="en-US"/>
           </a:p>
@@ -819,7 +852,7 @@
           <a:p>
             <a:fld id="{213391A8-7533-4DB4-AAEF-AD0BE3016822}" type="datetimeFigureOut">
               <a:rPr kumimoji="1" lang="ja-JP" altLang="en-US" smtClean="0"/>
-              <a:t>2026/7/9</a:t>
+              <a:t>2026/7/13</a:t>
             </a:fld>
             <a:endParaRPr kumimoji="1" lang="ja-JP" altLang="en-US"/>
           </a:p>
@@ -1049,7 +1082,7 @@
           <a:p>
             <a:fld id="{213391A8-7533-4DB4-AAEF-AD0BE3016822}" type="datetimeFigureOut">
               <a:rPr kumimoji="1" lang="ja-JP" altLang="en-US" smtClean="0"/>
-              <a:t>2026/7/9</a:t>
+              <a:t>2026/7/13</a:t>
             </a:fld>
             <a:endParaRPr kumimoji="1" lang="ja-JP" altLang="en-US"/>
           </a:p>
@@ -1324,7 +1357,7 @@
           <a:p>
             <a:fld id="{213391A8-7533-4DB4-AAEF-AD0BE3016822}" type="datetimeFigureOut">
               <a:rPr kumimoji="1" lang="ja-JP" altLang="en-US" smtClean="0"/>
-              <a:t>2026/7/9</a:t>
+              <a:t>2026/7/13</a:t>
             </a:fld>
             <a:endParaRPr kumimoji="1" lang="ja-JP" altLang="en-US"/>
           </a:p>
@@ -1653,7 +1686,7 @@
           <a:p>
             <a:fld id="{213391A8-7533-4DB4-AAEF-AD0BE3016822}" type="datetimeFigureOut">
               <a:rPr kumimoji="1" lang="ja-JP" altLang="en-US" smtClean="0"/>
-              <a:t>2026/7/9</a:t>
+              <a:t>2026/7/13</a:t>
             </a:fld>
             <a:endParaRPr kumimoji="1" lang="ja-JP" altLang="en-US"/>
           </a:p>
@@ -2129,7 +2162,7 @@
           <a:p>
             <a:fld id="{213391A8-7533-4DB4-AAEF-AD0BE3016822}" type="datetimeFigureOut">
               <a:rPr kumimoji="1" lang="ja-JP" altLang="en-US" smtClean="0"/>
-              <a:t>2026/7/9</a:t>
+              <a:t>2026/7/13</a:t>
             </a:fld>
             <a:endParaRPr kumimoji="1" lang="ja-JP" altLang="en-US"/>
           </a:p>
@@ -2270,7 +2303,7 @@
           <a:p>
             <a:fld id="{213391A8-7533-4DB4-AAEF-AD0BE3016822}" type="datetimeFigureOut">
               <a:rPr kumimoji="1" lang="ja-JP" altLang="en-US" smtClean="0"/>
-              <a:t>2026/7/9</a:t>
+              <a:t>2026/7/13</a:t>
             </a:fld>
             <a:endParaRPr kumimoji="1" lang="ja-JP" altLang="en-US"/>
           </a:p>
@@ -2383,7 +2416,7 @@
           <a:p>
             <a:fld id="{213391A8-7533-4DB4-AAEF-AD0BE3016822}" type="datetimeFigureOut">
               <a:rPr kumimoji="1" lang="ja-JP" altLang="en-US" smtClean="0"/>
-              <a:t>2026/7/9</a:t>
+              <a:t>2026/7/13</a:t>
             </a:fld>
             <a:endParaRPr kumimoji="1" lang="ja-JP" altLang="en-US"/>
           </a:p>
@@ -2726,7 +2759,7 @@
           <a:p>
             <a:fld id="{213391A8-7533-4DB4-AAEF-AD0BE3016822}" type="datetimeFigureOut">
               <a:rPr kumimoji="1" lang="ja-JP" altLang="en-US" smtClean="0"/>
-              <a:t>2026/7/9</a:t>
+              <a:t>2026/7/13</a:t>
             </a:fld>
             <a:endParaRPr kumimoji="1" lang="ja-JP" altLang="en-US"/>
           </a:p>
@@ -3014,7 +3047,7 @@
           <a:p>
             <a:fld id="{213391A8-7533-4DB4-AAEF-AD0BE3016822}" type="datetimeFigureOut">
               <a:rPr kumimoji="1" lang="ja-JP" altLang="en-US" smtClean="0"/>
-              <a:t>2026/7/9</a:t>
+              <a:t>2026/7/13</a:t>
             </a:fld>
             <a:endParaRPr kumimoji="1" lang="ja-JP" altLang="en-US"/>
           </a:p>
@@ -3287,7 +3320,7 @@
           <a:p>
             <a:fld id="{213391A8-7533-4DB4-AAEF-AD0BE3016822}" type="datetimeFigureOut">
               <a:rPr kumimoji="1" lang="ja-JP" altLang="en-US" smtClean="0"/>
-              <a:t>2026/7/9</a:t>
+              <a:t>2026/7/13</a:t>
             </a:fld>
             <a:endParaRPr kumimoji="1" lang="ja-JP" altLang="en-US"/>
           </a:p>
@@ -3704,56 +3737,6 @@
           <a:chExt cx="0" cy="0"/>
         </a:xfrm>
       </p:grpSpPr>
-      <p:sp>
-        <p:nvSpPr>
-          <p:cNvPr id="2" name="タイトル 1">
-            <a:extLst>
-              <a:ext uri="{FF2B5EF4-FFF2-40B4-BE49-F238E27FC236}">
-                <a16:creationId xmlns:a16="http://schemas.microsoft.com/office/drawing/2014/main" id="{58058AD9-D65F-BD30-0836-3D9EE8070E27}"/>
-              </a:ext>
-            </a:extLst>
-          </p:cNvPr>
-          <p:cNvSpPr>
-            <a:spLocks noGrp="1"/>
-          </p:cNvSpPr>
-          <p:nvPr>
-            <p:ph type="ctrTitle"/>
-          </p:nvPr>
-        </p:nvSpPr>
-        <p:spPr/>
-        <p:txBody>
-          <a:bodyPr/>
-          <a:lstStyle/>
-          <a:p>
-            <a:endParaRPr kumimoji="1" lang="ja-JP" altLang="en-US"/>
-          </a:p>
-        </p:txBody>
-      </p:sp>
-      <p:sp>
-        <p:nvSpPr>
-          <p:cNvPr id="3" name="字幕 2">
-            <a:extLst>
-              <a:ext uri="{FF2B5EF4-FFF2-40B4-BE49-F238E27FC236}">
-                <a16:creationId xmlns:a16="http://schemas.microsoft.com/office/drawing/2014/main" id="{139CD7A6-1647-E7FA-C896-F089175CB5E5}"/>
-              </a:ext>
-            </a:extLst>
-          </p:cNvPr>
-          <p:cNvSpPr>
-            <a:spLocks noGrp="1"/>
-          </p:cNvSpPr>
-          <p:nvPr>
-            <p:ph type="subTitle" idx="1"/>
-          </p:nvPr>
-        </p:nvSpPr>
-        <p:spPr/>
-        <p:txBody>
-          <a:bodyPr/>
-          <a:lstStyle/>
-          <a:p>
-            <a:endParaRPr kumimoji="1" lang="ja-JP" altLang="en-US"/>
-          </a:p>
-        </p:txBody>
-      </p:sp>
       <p:pic>
         <p:nvPicPr>
           <p:cNvPr id="5" name="図 4" descr="グラフィカル ユーザー インターフェイス, テキスト, アプリケーション, メール&#10;&#10;AI 生成コンテンツは誤りを含む可能性があります。">
@@ -3782,7 +3765,7 @@
         </p:blipFill>
         <p:spPr>
           <a:xfrm>
-            <a:off x="6037" y="647557"/>
+            <a:off x="12074" y="1017672"/>
             <a:ext cx="12179926" cy="5562886"/>
           </a:xfrm>
           <a:prstGeom prst="rect">
@@ -3790,6 +3773,61 @@
           </a:prstGeom>
         </p:spPr>
       </p:pic>
+      <p:sp>
+        <p:nvSpPr>
+          <p:cNvPr id="7" name="タイトル 1">
+            <a:extLst>
+              <a:ext uri="{FF2B5EF4-FFF2-40B4-BE49-F238E27FC236}">
+                <a16:creationId xmlns:a16="http://schemas.microsoft.com/office/drawing/2014/main" id="{AE88519B-FADC-2E84-E05C-E54BF46F6239}"/>
+              </a:ext>
+            </a:extLst>
+          </p:cNvPr>
+          <p:cNvSpPr txBox="1">
+            <a:spLocks/>
+          </p:cNvSpPr>
+          <p:nvPr/>
+        </p:nvSpPr>
+        <p:spPr>
+          <a:xfrm>
+            <a:off x="3750128" y="-307891"/>
+            <a:ext cx="4691743" cy="1325563"/>
+          </a:xfrm>
+          <a:prstGeom prst="rect">
+            <a:avLst/>
+          </a:prstGeom>
+        </p:spPr>
+        <p:txBody>
+          <a:bodyPr vert="horz" lIns="91440" tIns="45720" rIns="91440" bIns="45720" rtlCol="0" anchor="b">
+            <a:normAutofit/>
+          </a:bodyPr>
+          <a:lstStyle>
+            <a:lvl1pPr algn="ctr" defTabSz="914400" rtl="0" eaLnBrk="1" latinLnBrk="0" hangingPunct="1">
+              <a:lnSpc>
+                <a:spcPct val="90000"/>
+              </a:lnSpc>
+              <a:spcBef>
+                <a:spcPct val="0"/>
+              </a:spcBef>
+              <a:buNone/>
+              <a:defRPr kumimoji="1" sz="6000" kern="1200">
+                <a:solidFill>
+                  <a:schemeClr val="tx1"/>
+                </a:solidFill>
+                <a:latin typeface="+mj-lt"/>
+                <a:ea typeface="+mj-ea"/>
+                <a:cs typeface="+mj-cs"/>
+              </a:defRPr>
+            </a:lvl1pPr>
+          </a:lstStyle>
+          <a:p>
+            <a:r>
+              <a:rPr lang="en-US" altLang="ja-JP" dirty="0"/>
+              <a:t>Home page</a:t>
+            </a:r>
+            <a:endParaRPr lang="ja-JP" altLang="en-US" dirty="0"/>
+          </a:p>
+        </p:txBody>
+      </p:sp>
     </p:spTree>
     <p:extLst>
       <p:ext uri="{BB962C8B-B14F-4D97-AF65-F5344CB8AC3E}">
@@ -3836,12 +3874,21 @@
             <p:ph type="title"/>
           </p:nvPr>
         </p:nvSpPr>
-        <p:spPr/>
+        <p:spPr>
+          <a:xfrm>
+            <a:off x="8033657" y="1225097"/>
+            <a:ext cx="4071257" cy="1325563"/>
+          </a:xfrm>
+        </p:spPr>
         <p:txBody>
           <a:bodyPr/>
           <a:lstStyle/>
           <a:p>
-            <a:endParaRPr kumimoji="1" lang="ja-JP" altLang="en-US"/>
+            <a:r>
+              <a:rPr kumimoji="1" lang="en-US" altLang="ja-JP" dirty="0"/>
+              <a:t>Task approval</a:t>
+            </a:r>
+            <a:endParaRPr kumimoji="1" lang="ja-JP" altLang="en-US" dirty="0"/>
           </a:p>
         </p:txBody>
       </p:sp>
@@ -3926,12 +3973,21 @@
             <p:ph type="title"/>
           </p:nvPr>
         </p:nvSpPr>
-        <p:spPr/>
+        <p:spPr>
+          <a:xfrm>
+            <a:off x="4309109" y="268219"/>
+            <a:ext cx="3820886" cy="1325563"/>
+          </a:xfrm>
+        </p:spPr>
         <p:txBody>
           <a:bodyPr/>
           <a:lstStyle/>
           <a:p>
-            <a:endParaRPr kumimoji="1" lang="ja-JP" altLang="en-US"/>
+            <a:r>
+              <a:rPr kumimoji="1" lang="en-US" altLang="ja-JP" dirty="0"/>
+              <a:t>Status change</a:t>
+            </a:r>
+            <a:endParaRPr kumimoji="1" lang="ja-JP" altLang="en-US" dirty="0"/>
           </a:p>
         </p:txBody>
       </p:sp>
@@ -3990,8 +4046,8 @@
           </a:prstGeom>
         </p:spPr>
       </p:pic>
-      <mc:AlternateContent xmlns:mc="http://schemas.openxmlformats.org/markup-compatibility/2006">
-        <mc:Choice xmlns:p14="http://schemas.microsoft.com/office/powerpoint/2010/main" Requires="p14">
+      <mc:AlternateContent xmlns:mc="http://schemas.openxmlformats.org/markup-compatibility/2006" xmlns:p14="http://schemas.microsoft.com/office/powerpoint/2010/main">
+        <mc:Choice Requires="p14">
           <p:contentPart p14:bwMode="auto" r:id="rId3">
             <p14:nvContentPartPr>
               <p14:cNvPr id="6" name="インク 5">
@@ -4010,7 +4066,7 @@
             </p14:xfrm>
           </p:contentPart>
         </mc:Choice>
-        <mc:Fallback>
+        <mc:Fallback xmlns="">
           <p:pic>
             <p:nvPicPr>
               <p:cNvPr id="6" name="インク 5">
@@ -4089,8 +4145,8 @@
         </p:nvSpPr>
         <p:spPr>
           <a:xfrm>
-            <a:off x="1157689" y="0"/>
-            <a:ext cx="10515600" cy="1325563"/>
+            <a:off x="4129489" y="-108857"/>
+            <a:ext cx="4187197" cy="1325563"/>
           </a:xfrm>
         </p:spPr>
         <p:txBody>
@@ -4186,12 +4242,21 @@
             <p:ph type="title"/>
           </p:nvPr>
         </p:nvSpPr>
-        <p:spPr/>
+        <p:spPr>
+          <a:xfrm>
+            <a:off x="3831771" y="0"/>
+            <a:ext cx="4691743" cy="1325563"/>
+          </a:xfrm>
+        </p:spPr>
         <p:txBody>
           <a:bodyPr/>
           <a:lstStyle/>
           <a:p>
-            <a:endParaRPr kumimoji="1" lang="ja-JP" altLang="en-US"/>
+            <a:r>
+              <a:rPr kumimoji="1" lang="en-US" altLang="ja-JP" dirty="0"/>
+              <a:t>Register &amp; Log in</a:t>
+            </a:r>
+            <a:endParaRPr kumimoji="1" lang="ja-JP" altLang="en-US" dirty="0"/>
           </a:p>
         </p:txBody>
       </p:sp>
@@ -4225,7 +4290,7 @@
         </p:blipFill>
         <p:spPr>
           <a:xfrm>
-            <a:off x="838200" y="649967"/>
+            <a:off x="838200" y="1499051"/>
             <a:ext cx="3712455" cy="5326289"/>
           </a:xfrm>
         </p:spPr>
@@ -4244,7 +4309,7 @@
         </p:nvSpPr>
         <p:spPr>
           <a:xfrm>
-            <a:off x="5529943" y="3106524"/>
+            <a:off x="5529943" y="3955608"/>
             <a:ext cx="978408" cy="484632"/>
           </a:xfrm>
           <a:prstGeom prst="rightArrow">
@@ -4304,7 +4369,7 @@
         </p:blipFill>
         <p:spPr>
           <a:xfrm>
-            <a:off x="7204434" y="1050022"/>
+            <a:off x="7204434" y="1899106"/>
             <a:ext cx="3683189" cy="4597636"/>
           </a:xfrm>
           <a:prstGeom prst="rect">
@@ -4457,12 +4522,21 @@
             <p:ph type="title"/>
           </p:nvPr>
         </p:nvSpPr>
-        <p:spPr/>
+        <p:spPr>
+          <a:xfrm>
+            <a:off x="4343400" y="67810"/>
+            <a:ext cx="3460031" cy="1325563"/>
+          </a:xfrm>
+        </p:spPr>
         <p:txBody>
           <a:bodyPr/>
           <a:lstStyle/>
           <a:p>
-            <a:endParaRPr kumimoji="1" lang="ja-JP" altLang="en-US"/>
+            <a:r>
+              <a:rPr kumimoji="1" lang="en-US" altLang="ja-JP" dirty="0"/>
+              <a:t>Task creation</a:t>
+            </a:r>
+            <a:endParaRPr kumimoji="1" lang="ja-JP" altLang="en-US" dirty="0"/>
           </a:p>
         </p:txBody>
       </p:sp>
@@ -4490,7 +4564,7 @@
         </p:blipFill>
         <p:spPr>
           <a:xfrm>
-            <a:off x="1230897" y="715282"/>
+            <a:off x="1230897" y="1172484"/>
             <a:ext cx="3460033" cy="4351338"/>
           </a:xfrm>
           <a:prstGeom prst="rect">
@@ -4520,7 +4594,7 @@
         </p:blipFill>
         <p:spPr>
           <a:xfrm>
-            <a:off x="6658594" y="1873500"/>
+            <a:off x="6658594" y="2330702"/>
             <a:ext cx="4001375" cy="2208644"/>
           </a:xfrm>
           <a:prstGeom prst="rect">
@@ -4578,7 +4652,7 @@
         </p:nvSpPr>
         <p:spPr>
           <a:xfrm>
-            <a:off x="2503714" y="5431971"/>
+            <a:off x="2503714" y="5889173"/>
             <a:ext cx="576940" cy="740229"/>
           </a:xfrm>
           <a:prstGeom prst="downArrow">
@@ -4624,7 +4698,7 @@
         </p:nvSpPr>
         <p:spPr>
           <a:xfrm>
-            <a:off x="8039105" y="566057"/>
+            <a:off x="8039105" y="1023259"/>
             <a:ext cx="576940" cy="740229"/>
           </a:xfrm>
           <a:prstGeom prst="downArrow">
@@ -4702,12 +4776,21 @@
             <p:ph type="title"/>
           </p:nvPr>
         </p:nvSpPr>
-        <p:spPr/>
+        <p:spPr>
+          <a:xfrm>
+            <a:off x="4735286" y="256268"/>
+            <a:ext cx="3189514" cy="1325563"/>
+          </a:xfrm>
+        </p:spPr>
         <p:txBody>
           <a:bodyPr/>
           <a:lstStyle/>
           <a:p>
-            <a:endParaRPr kumimoji="1" lang="ja-JP" altLang="en-US"/>
+            <a:r>
+              <a:rPr kumimoji="1" lang="en-US" altLang="ja-JP" dirty="0"/>
+              <a:t>Task details</a:t>
+            </a:r>
+            <a:endParaRPr kumimoji="1" lang="ja-JP" altLang="en-US" dirty="0"/>
           </a:p>
         </p:txBody>
       </p:sp>
@@ -4741,7 +4824,7 @@
         </p:blipFill>
         <p:spPr>
           <a:xfrm>
-            <a:off x="1041469" y="810864"/>
+            <a:off x="1041469" y="1736150"/>
             <a:ext cx="10109061" cy="4351338"/>
           </a:xfrm>
         </p:spPr>
@@ -4792,12 +4875,21 @@
             <p:ph type="title"/>
           </p:nvPr>
         </p:nvSpPr>
-        <p:spPr/>
+        <p:spPr>
+          <a:xfrm>
+            <a:off x="4434216" y="92983"/>
+            <a:ext cx="2982686" cy="1325563"/>
+          </a:xfrm>
+        </p:spPr>
         <p:txBody>
           <a:bodyPr/>
           <a:lstStyle/>
           <a:p>
-            <a:endParaRPr kumimoji="1" lang="ja-JP" altLang="en-US"/>
+            <a:r>
+              <a:rPr kumimoji="1" lang="en-US" altLang="ja-JP" dirty="0"/>
+              <a:t>Comments</a:t>
+            </a:r>
+            <a:endParaRPr kumimoji="1" lang="ja-JP" altLang="en-US" dirty="0"/>
           </a:p>
         </p:txBody>
       </p:sp>
@@ -4831,7 +4923,7 @@
         </p:blipFill>
         <p:spPr>
           <a:xfrm>
-            <a:off x="2854330" y="943881"/>
+            <a:off x="2832559" y="1792967"/>
             <a:ext cx="6186000" cy="4814661"/>
           </a:xfrm>
         </p:spPr>
@@ -4882,12 +4974,21 @@
             <p:ph type="title"/>
           </p:nvPr>
         </p:nvSpPr>
-        <p:spPr/>
+        <p:spPr>
+          <a:xfrm>
+            <a:off x="3875314" y="-64550"/>
+            <a:ext cx="3465906" cy="1325563"/>
+          </a:xfrm>
+        </p:spPr>
         <p:txBody>
           <a:bodyPr/>
           <a:lstStyle/>
           <a:p>
-            <a:endParaRPr kumimoji="1" lang="ja-JP" altLang="en-US"/>
+            <a:r>
+              <a:rPr kumimoji="1" lang="en-US" altLang="ja-JP" dirty="0"/>
+              <a:t>Edit &amp; delete</a:t>
+            </a:r>
+            <a:endParaRPr kumimoji="1" lang="ja-JP" altLang="en-US" dirty="0"/>
           </a:p>
         </p:txBody>
       </p:sp>
@@ -4962,42 +5063,6 @@
           </a:prstGeom>
         </p:spPr>
       </p:pic>
-      <p:sp>
-        <p:nvSpPr>
-          <p:cNvPr id="8" name="テキスト ボックス 7">
-            <a:extLst>
-              <a:ext uri="{FF2B5EF4-FFF2-40B4-BE49-F238E27FC236}">
-                <a16:creationId xmlns:a16="http://schemas.microsoft.com/office/drawing/2014/main" id="{7F669183-C157-0CB5-604D-B6583B60ACC1}"/>
-              </a:ext>
-            </a:extLst>
-          </p:cNvPr>
-          <p:cNvSpPr txBox="1"/>
-          <p:nvPr/>
-        </p:nvSpPr>
-        <p:spPr>
-          <a:xfrm>
-            <a:off x="838200" y="443131"/>
-            <a:ext cx="974947" cy="584775"/>
-          </a:xfrm>
-          <a:prstGeom prst="rect">
-            <a:avLst/>
-          </a:prstGeom>
-          <a:noFill/>
-        </p:spPr>
-        <p:txBody>
-          <a:bodyPr wrap="none" rtlCol="0">
-            <a:spAutoFit/>
-          </a:bodyPr>
-          <a:lstStyle/>
-          <a:p>
-            <a:r>
-              <a:rPr kumimoji="1" lang="en-US" altLang="ja-JP" sz="3200" b="1" dirty="0"/>
-              <a:t>Edit</a:t>
-            </a:r>
-            <a:endParaRPr kumimoji="1" lang="ja-JP" altLang="en-US" sz="3200" b="1" dirty="0"/>
-          </a:p>
-        </p:txBody>
-      </p:sp>
       <p:cxnSp>
         <p:nvCxnSpPr>
           <p:cNvPr id="10" name="直線コネクタ 9">
@@ -5083,7 +5148,7 @@
         <p:spPr>
           <a:xfrm>
             <a:off x="4033092" y="0"/>
-            <a:ext cx="10515600" cy="1325563"/>
+            <a:ext cx="4054994" cy="1325563"/>
           </a:xfrm>
         </p:spPr>
         <p:txBody>
@@ -5133,6 +5198,57 @@
           </a:xfrm>
         </p:spPr>
       </p:pic>
+      <mc:AlternateContent xmlns:mc="http://schemas.openxmlformats.org/markup-compatibility/2006" xmlns:p14="http://schemas.microsoft.com/office/powerpoint/2010/main">
+        <mc:Choice Requires="p14">
+          <p:contentPart p14:bwMode="auto" r:id="rId3">
+            <p14:nvContentPartPr>
+              <p14:cNvPr id="6" name="インク 5">
+                <a:extLst>
+                  <a:ext uri="{FF2B5EF4-FFF2-40B4-BE49-F238E27FC236}">
+                    <a16:creationId xmlns:a16="http://schemas.microsoft.com/office/drawing/2014/main" id="{11F87D57-37A7-9390-089E-C16DCF245317}"/>
+                  </a:ext>
+                </a:extLst>
+              </p14:cNvPr>
+              <p14:cNvContentPartPr/>
+              <p14:nvPr/>
+            </p14:nvContentPartPr>
+            <p14:xfrm>
+              <a:off x="9981017" y="3003086"/>
+              <a:ext cx="1102320" cy="644400"/>
+            </p14:xfrm>
+          </p:contentPart>
+        </mc:Choice>
+        <mc:Fallback xmlns="">
+          <p:pic>
+            <p:nvPicPr>
+              <p:cNvPr id="6" name="インク 5">
+                <a:extLst>
+                  <a:ext uri="{FF2B5EF4-FFF2-40B4-BE49-F238E27FC236}">
+                    <a16:creationId xmlns:a16="http://schemas.microsoft.com/office/drawing/2014/main" id="{11F87D57-37A7-9390-089E-C16DCF245317}"/>
+                  </a:ext>
+                </a:extLst>
+              </p:cNvPr>
+              <p:cNvPicPr/>
+              <p:nvPr/>
+            </p:nvPicPr>
+            <p:blipFill>
+              <a:blip r:embed="rId4"/>
+              <a:stretch>
+                <a:fillRect/>
+              </a:stretch>
+            </p:blipFill>
+            <p:spPr>
+              <a:xfrm>
+                <a:off x="9974897" y="2996966"/>
+                <a:ext cx="1114560" cy="656640"/>
+              </a:xfrm>
+              <a:prstGeom prst="rect">
+                <a:avLst/>
+              </a:prstGeom>
+            </p:spPr>
+          </p:pic>
+        </mc:Fallback>
+      </mc:AlternateContent>
     </p:spTree>
     <p:extLst>
       <p:ext uri="{BB962C8B-B14F-4D97-AF65-F5344CB8AC3E}">
@@ -5280,8 +5396,8 @@
           </a:p>
         </p:txBody>
       </p:sp>
-      <mc:AlternateContent xmlns:mc="http://schemas.openxmlformats.org/markup-compatibility/2006">
-        <mc:Choice xmlns:p14="http://schemas.microsoft.com/office/powerpoint/2010/main" Requires="p14">
+      <mc:AlternateContent xmlns:mc="http://schemas.openxmlformats.org/markup-compatibility/2006" xmlns:p14="http://schemas.microsoft.com/office/powerpoint/2010/main">
+        <mc:Choice Requires="p14">
           <p:contentPart p14:bwMode="auto" r:id="rId4">
             <p14:nvContentPartPr>
               <p14:cNvPr id="10" name="インク 9">
@@ -5300,7 +5416,7 @@
             </p14:xfrm>
           </p:contentPart>
         </mc:Choice>
-        <mc:Fallback>
+        <mc:Fallback xmlns="">
           <p:pic>
             <p:nvPicPr>
               <p:cNvPr id="10" name="インク 9">
@@ -5350,23 +5466,38 @@
         <p:spPr>
           <a:xfrm>
             <a:off x="5574535" y="4297596"/>
-            <a:ext cx="10515600" cy="1325563"/>
+            <a:ext cx="3558579" cy="1325563"/>
           </a:xfrm>
         </p:spPr>
         <p:txBody>
-          <a:bodyPr/>
-          <a:lstStyle/>
-          <a:p>
-            <a:r>
-              <a:rPr kumimoji="1" lang="en-US" altLang="ja-JP" dirty="0"/>
-              <a:t>Leader page</a:t>
-            </a:r>
-            <a:endParaRPr kumimoji="1" lang="ja-JP" altLang="en-US" dirty="0"/>
-          </a:p>
-        </p:txBody>
-      </p:sp>
-      <mc:AlternateContent xmlns:mc="http://schemas.openxmlformats.org/markup-compatibility/2006">
-        <mc:Choice xmlns:p14="http://schemas.microsoft.com/office/powerpoint/2010/main" Requires="p14">
+          <a:bodyPr>
+            <a:normAutofit/>
+          </a:bodyPr>
+          <a:lstStyle/>
+          <a:p>
+            <a:r>
+              <a:rPr lang="en-US" altLang="ja-JP" sz="2800" dirty="0">
+                <a:latin typeface="Times New Roman" panose="02020603050405020304" pitchFamily="18" charset="0"/>
+                <a:cs typeface="Times New Roman" panose="02020603050405020304" pitchFamily="18" charset="0"/>
+              </a:rPr>
+              <a:t>l</a:t>
+            </a:r>
+            <a:r>
+              <a:rPr kumimoji="1" lang="en-US" altLang="ja-JP" sz="2800" dirty="0">
+                <a:latin typeface="Times New Roman" panose="02020603050405020304" pitchFamily="18" charset="0"/>
+                <a:cs typeface="Times New Roman" panose="02020603050405020304" pitchFamily="18" charset="0"/>
+              </a:rPr>
+              <a:t>eader page</a:t>
+            </a:r>
+            <a:endParaRPr kumimoji="1" lang="ja-JP" altLang="en-US" sz="2800" dirty="0">
+              <a:latin typeface="Times New Roman" panose="02020603050405020304" pitchFamily="18" charset="0"/>
+              <a:cs typeface="Times New Roman" panose="02020603050405020304" pitchFamily="18" charset="0"/>
+            </a:endParaRPr>
+          </a:p>
+        </p:txBody>
+      </p:sp>
+      <mc:AlternateContent xmlns:mc="http://schemas.openxmlformats.org/markup-compatibility/2006" xmlns:p14="http://schemas.microsoft.com/office/powerpoint/2010/main">
+        <mc:Choice Requires="p14">
           <p:contentPart p14:bwMode="auto" r:id="rId6">
             <p14:nvContentPartPr>
               <p14:cNvPr id="11" name="インク 10">
@@ -5385,7 +5516,7 @@
             </p14:xfrm>
           </p:contentPart>
         </mc:Choice>
-        <mc:Fallback>
+        <mc:Fallback xmlns="">
           <p:pic>
             <p:nvPicPr>
               <p:cNvPr id="11" name="インク 10">
@@ -5416,6 +5547,65 @@
           </p:pic>
         </mc:Fallback>
       </mc:AlternateContent>
+      <p:sp>
+        <p:nvSpPr>
+          <p:cNvPr id="3" name="タイトル 1">
+            <a:extLst>
+              <a:ext uri="{FF2B5EF4-FFF2-40B4-BE49-F238E27FC236}">
+                <a16:creationId xmlns:a16="http://schemas.microsoft.com/office/drawing/2014/main" id="{BEBA83BF-217E-5C97-7C08-3D55FA849180}"/>
+              </a:ext>
+            </a:extLst>
+          </p:cNvPr>
+          <p:cNvSpPr txBox="1">
+            <a:spLocks/>
+          </p:cNvSpPr>
+          <p:nvPr/>
+        </p:nvSpPr>
+        <p:spPr>
+          <a:xfrm>
+            <a:off x="7734234" y="0"/>
+            <a:ext cx="4054994" cy="1325563"/>
+          </a:xfrm>
+          <a:prstGeom prst="rect">
+            <a:avLst/>
+          </a:prstGeom>
+        </p:spPr>
+        <p:txBody>
+          <a:bodyPr vert="horz" lIns="91440" tIns="45720" rIns="91440" bIns="45720" rtlCol="0" anchor="ctr">
+            <a:normAutofit/>
+          </a:bodyPr>
+          <a:lstStyle>
+            <a:lvl1pPr algn="l" defTabSz="914400" rtl="0" eaLnBrk="1" latinLnBrk="0" hangingPunct="1">
+              <a:lnSpc>
+                <a:spcPct val="90000"/>
+              </a:lnSpc>
+              <a:spcBef>
+                <a:spcPct val="0"/>
+              </a:spcBef>
+              <a:buNone/>
+              <a:defRPr kumimoji="1" sz="4400" kern="1200">
+                <a:solidFill>
+                  <a:schemeClr val="tx1"/>
+                </a:solidFill>
+                <a:latin typeface="+mj-lt"/>
+                <a:ea typeface="+mj-ea"/>
+                <a:cs typeface="+mj-cs"/>
+              </a:defRPr>
+            </a:lvl1pPr>
+          </a:lstStyle>
+          <a:p>
+            <a:r>
+              <a:rPr lang="en-US" altLang="ja-JP" dirty="0"/>
+              <a:t>Task </a:t>
+            </a:r>
+            <a:r>
+              <a:rPr lang="en-US" altLang="ja-JP" dirty="0" err="1"/>
+              <a:t>submition</a:t>
+            </a:r>
+            <a:endParaRPr lang="ja-JP" altLang="en-US" dirty="0"/>
+          </a:p>
+        </p:txBody>
+      </p:sp>
     </p:spTree>
     <p:extLst>
       <p:ext uri="{BB962C8B-B14F-4D97-AF65-F5344CB8AC3E}">

--- a/TaskManager.pptx
+++ b/TaskManager.pptx
@@ -4476,6 +4476,158 @@
           </a:xfrm>
         </p:spPr>
       </p:pic>
+      <p:sp>
+        <p:nvSpPr>
+          <p:cNvPr id="3" name="テキスト ボックス 2">
+            <a:extLst>
+              <a:ext uri="{FF2B5EF4-FFF2-40B4-BE49-F238E27FC236}">
+                <a16:creationId xmlns:a16="http://schemas.microsoft.com/office/drawing/2014/main" id="{440AEF81-F6D2-D239-1714-2D338E544C22}"/>
+              </a:ext>
+            </a:extLst>
+          </p:cNvPr>
+          <p:cNvSpPr txBox="1"/>
+          <p:nvPr/>
+        </p:nvSpPr>
+        <p:spPr>
+          <a:xfrm>
+            <a:off x="324736" y="3059668"/>
+            <a:ext cx="1253693" cy="369332"/>
+          </a:xfrm>
+          <a:prstGeom prst="rect">
+            <a:avLst/>
+          </a:prstGeom>
+          <a:noFill/>
+        </p:spPr>
+        <p:txBody>
+          <a:bodyPr wrap="square" rtlCol="0">
+            <a:spAutoFit/>
+          </a:bodyPr>
+          <a:lstStyle/>
+          <a:p>
+            <a:r>
+              <a:rPr kumimoji="1" lang="en-US" altLang="ja-JP" b="1" dirty="0"/>
+              <a:t>Sorting</a:t>
+            </a:r>
+            <a:endParaRPr kumimoji="1" lang="ja-JP" altLang="en-US" dirty="0"/>
+          </a:p>
+        </p:txBody>
+      </p:sp>
+      <p:cxnSp>
+        <p:nvCxnSpPr>
+          <p:cNvPr id="6" name="直線矢印コネクタ 5">
+            <a:extLst>
+              <a:ext uri="{FF2B5EF4-FFF2-40B4-BE49-F238E27FC236}">
+                <a16:creationId xmlns:a16="http://schemas.microsoft.com/office/drawing/2014/main" id="{10E6D691-851E-C95B-16A2-2824101A606B}"/>
+              </a:ext>
+            </a:extLst>
+          </p:cNvPr>
+          <p:cNvCxnSpPr/>
+          <p:nvPr/>
+        </p:nvCxnSpPr>
+        <p:spPr>
+          <a:xfrm>
+            <a:off x="1328057" y="3276600"/>
+            <a:ext cx="696686" cy="0"/>
+          </a:xfrm>
+          <a:prstGeom prst="straightConnector1">
+            <a:avLst/>
+          </a:prstGeom>
+          <a:ln>
+            <a:tailEnd type="triangle"/>
+          </a:ln>
+        </p:spPr>
+        <p:style>
+          <a:lnRef idx="2">
+            <a:schemeClr val="accent1"/>
+          </a:lnRef>
+          <a:fillRef idx="0">
+            <a:schemeClr val="accent1"/>
+          </a:fillRef>
+          <a:effectRef idx="1">
+            <a:schemeClr val="accent1"/>
+          </a:effectRef>
+          <a:fontRef idx="minor">
+            <a:schemeClr val="tx1"/>
+          </a:fontRef>
+        </p:style>
+      </p:cxnSp>
+      <p:sp>
+        <p:nvSpPr>
+          <p:cNvPr id="7" name="テキスト ボックス 6">
+            <a:extLst>
+              <a:ext uri="{FF2B5EF4-FFF2-40B4-BE49-F238E27FC236}">
+                <a16:creationId xmlns:a16="http://schemas.microsoft.com/office/drawing/2014/main" id="{A884F6E3-75EA-B5DD-B2E6-92454BBD6D8B}"/>
+              </a:ext>
+            </a:extLst>
+          </p:cNvPr>
+          <p:cNvSpPr txBox="1"/>
+          <p:nvPr/>
+        </p:nvSpPr>
+        <p:spPr>
+          <a:xfrm>
+            <a:off x="133317" y="2054109"/>
+            <a:ext cx="1253693" cy="646331"/>
+          </a:xfrm>
+          <a:prstGeom prst="rect">
+            <a:avLst/>
+          </a:prstGeom>
+          <a:noFill/>
+        </p:spPr>
+        <p:txBody>
+          <a:bodyPr wrap="square" rtlCol="0">
+            <a:spAutoFit/>
+          </a:bodyPr>
+          <a:lstStyle/>
+          <a:p>
+            <a:r>
+              <a:rPr lang="en-US" altLang="ja-JP" b="1" dirty="0"/>
+              <a:t>Filter by status</a:t>
+            </a:r>
+            <a:endParaRPr kumimoji="1" lang="ja-JP" altLang="en-US" dirty="0"/>
+          </a:p>
+        </p:txBody>
+      </p:sp>
+      <p:cxnSp>
+        <p:nvCxnSpPr>
+          <p:cNvPr id="8" name="直線矢印コネクタ 7">
+            <a:extLst>
+              <a:ext uri="{FF2B5EF4-FFF2-40B4-BE49-F238E27FC236}">
+                <a16:creationId xmlns:a16="http://schemas.microsoft.com/office/drawing/2014/main" id="{34CD27FE-92E4-F14B-58AC-C638C0A223A6}"/>
+              </a:ext>
+            </a:extLst>
+          </p:cNvPr>
+          <p:cNvCxnSpPr>
+            <a:cxnSpLocks/>
+          </p:cNvCxnSpPr>
+          <p:nvPr/>
+        </p:nvCxnSpPr>
+        <p:spPr>
+          <a:xfrm>
+            <a:off x="951582" y="2569030"/>
+            <a:ext cx="376475" cy="0"/>
+          </a:xfrm>
+          <a:prstGeom prst="straightConnector1">
+            <a:avLst/>
+          </a:prstGeom>
+          <a:ln>
+            <a:tailEnd type="triangle"/>
+          </a:ln>
+        </p:spPr>
+        <p:style>
+          <a:lnRef idx="2">
+            <a:schemeClr val="accent1"/>
+          </a:lnRef>
+          <a:fillRef idx="0">
+            <a:schemeClr val="accent1"/>
+          </a:fillRef>
+          <a:effectRef idx="1">
+            <a:schemeClr val="accent1"/>
+          </a:effectRef>
+          <a:fontRef idx="minor">
+            <a:schemeClr val="tx1"/>
+          </a:fontRef>
+        </p:style>
+      </p:cxnSp>
     </p:spTree>
     <p:extLst>
       <p:ext uri="{BB962C8B-B14F-4D97-AF65-F5344CB8AC3E}">
